--- a/docs/Lexora_Presentation.pptx
+++ b/docs/Lexora_Presentation.pptx
@@ -2328,7 +2328,7 @@
                 <a:ea typeface="Calibri" pitchFamily="34" charset="-122"/>
                 <a:cs typeface="Calibri" pitchFamily="34" charset="-120"/>
               </a:rPr>
-              <a:t>Rule-based + ML models catch dyslexia-linked patterns: letter reversals, phonetic spelling errors, mispronunciations.</a:t>
+              <a:t>Deterministic rules + real-data models catch literacy patterns: letter reversals, phonetic spelling errors, reading-ladder errors and mispronunciations (phoneme-level).</a:t>
             </a:r>
             <a:endParaRPr lang="en-US" sz="1100" dirty="0"/>
           </a:p>
@@ -2555,7 +2555,7 @@
                 <a:ea typeface="Calibri" pitchFamily="34" charset="-122"/>
                 <a:cs typeface="Calibri" pitchFamily="34" charset="-120"/>
               </a:rPr>
-              <a:t>An explainable ML classifier turns those patterns into a screening score with a clear breakdown of why.</a:t>
+              <a:t>An ASER-trained reading-level model (XGBoost + SHAP) plus an additive screening indicator turn those patterns into a score with an exact breakdown of why.</a:t>
             </a:r>
             <a:endParaRPr lang="en-US" sz="1100" dirty="0"/>
           </a:p>
@@ -2782,7 +2782,7 @@
                 <a:ea typeface="Calibri" pitchFamily="34" charset="-122"/>
                 <a:cs typeface="Calibri" pitchFamily="34" charset="-120"/>
               </a:rPr>
-              <a:t>An LLM creates personalized stories and exercises targeting the child's specific error profile.</a:t>
+              <a:t>Personalised stories and exercises target the child's error profile — a local generator by default, Gemini as an optional enhancement.</a:t>
             </a:r>
             <a:endParaRPr lang="en-US" sz="1100" dirty="0"/>
           </a:p>
@@ -3405,7 +3405,7 @@
                 <a:ea typeface="Calibri" pitchFamily="34" charset="-122"/>
                 <a:cs typeface="Calibri" pitchFamily="34" charset="-120"/>
               </a:rPr>
-              <a:t>FastAPI (Python) — async support for audio uploads &amp; concurrent ASR/LLM calls</a:t>
+              <a:t>FastAPI (Python) — non-blocking audio analysis, JWT auth, role-based access</a:t>
             </a:r>
             <a:endParaRPr lang="en-US" sz="1150" dirty="0"/>
           </a:p>
@@ -3526,7 +3526,7 @@
                 <a:ea typeface="Calibri" pitchFamily="34" charset="-122"/>
                 <a:cs typeface="Calibri" pitchFamily="34" charset="-120"/>
               </a:rPr>
-              <a:t>MySQL — user profiles, scores, session metadata, progress history</a:t>
+              <a:t>SQLite by default (zero setup), MySQL supported via one setting — profiles, screenings, scores, practice, progress</a:t>
             </a:r>
             <a:endParaRPr lang="en-US" sz="1150" dirty="0"/>
           </a:p>
@@ -3647,7 +3647,7 @@
                 <a:ea typeface="Calibri" pitchFamily="34" charset="-122"/>
                 <a:cs typeface="Calibri" pitchFamily="34" charset="-120"/>
               </a:rPr>
-              <a:t>S3-compatible object store (AWS S3 / MinIO) for raw audio &amp; writing samples</a:t>
+              <a:t>Local storage behind an S3-shaped interface; raw research datasets stay out of the app and out of Git</a:t>
             </a:r>
             <a:endParaRPr lang="en-US" sz="1150" dirty="0"/>
           </a:p>
@@ -3768,7 +3768,7 @@
                 <a:ea typeface="Calibri" pitchFamily="34" charset="-122"/>
                 <a:cs typeface="Calibri" pitchFamily="34" charset="-120"/>
               </a:rPr>
-              <a:t>OpenAI Whisper — open-source, fine-tunable on children's speech</a:t>
+              <a:t>faster-whisper (local, CPU, no API) — validated on real ASER clips; examiner marks stay primary, transcript correctable</a:t>
             </a:r>
             <a:endParaRPr lang="en-US" sz="1150" dirty="0"/>
           </a:p>
@@ -3850,7 +3850,7 @@
                 <a:ea typeface="Calibri" pitchFamily="34" charset="-122"/>
                 <a:cs typeface="Calibri" pitchFamily="34" charset="-120"/>
               </a:rPr>
-              <a:t>Forced Alignment</a:t>
+              <a:t>Pronunciation Layer</a:t>
             </a:r>
             <a:endParaRPr lang="en-US" sz="1250" dirty="0"/>
           </a:p>
@@ -3889,7 +3889,7 @@
                 <a:ea typeface="Calibri" pitchFamily="34" charset="-122"/>
                 <a:cs typeface="Calibri" pitchFamily="34" charset="-120"/>
               </a:rPr>
-              <a:t>Montreal Forced Aligner / wav2vec2+CTC for word &amp; phoneme-level timestamps</a:t>
+              <a:t>wav2vec2-XLSR phoneme recogniser (no language model) + accent-tolerant phoneme alignment — flags mispronounced words Whisper would "repair"</a:t>
             </a:r>
             <a:endParaRPr lang="en-US" sz="1150" dirty="0"/>
           </a:p>
@@ -4010,7 +4010,7 @@
                 <a:ea typeface="Calibri" pitchFamily="34" charset="-122"/>
                 <a:cs typeface="Calibri" pitchFamily="34" charset="-120"/>
               </a:rPr>
-              <a:t>Rule-based edit-distance + reversal dictionaries; optional DistilBERT fine-tune later</a:t>
+              <a:t>Rule-based edit-distance alignment, reversal / transposition / phonetic patterns — validated on Birkbeck &amp; Holbrook misspelling corpora</a:t>
             </a:r>
             <a:endParaRPr lang="en-US" sz="1150" dirty="0"/>
           </a:p>
@@ -4131,7 +4131,7 @@
                 <a:ea typeface="Calibri" pitchFamily="34" charset="-122"/>
                 <a:cs typeface="Calibri" pitchFamily="34" charset="-120"/>
               </a:rPr>
-              <a:t>XGBoost / LightGBM on engineered features — explainable, data-efficient</a:t>
+              <a:t>XGBoost reading-level model trained on 4,908 real ASER sessions (0.89 held-out accuracy) + additive indicator; method checked on Rello et al.</a:t>
             </a:r>
             <a:endParaRPr lang="en-US" sz="1150" dirty="0"/>
           </a:p>
@@ -4252,7 +4252,7 @@
                 <a:ea typeface="Calibri" pitchFamily="34" charset="-122"/>
                 <a:cs typeface="Calibri" pitchFamily="34" charset="-120"/>
               </a:rPr>
-              <a:t>SHAP — shows which features drove a given risk score</a:t>
+              <a:t>SHAP (TreeSHAP) on the reading-level model + exact additive contributions for the indicator</a:t>
             </a:r>
             <a:endParaRPr lang="en-US" sz="1150" dirty="0"/>
           </a:p>
@@ -4373,7 +4373,7 @@
                 <a:ea typeface="Calibri" pitchFamily="34" charset="-122"/>
                 <a:cs typeface="Calibri" pitchFamily="34" charset="-120"/>
               </a:rPr>
-              <a:t>Claude or GPT via API, prompt-engineered with few-shot examples</a:t>
+              <a:t>Deterministic local generator (always works, no key) with optional Gemini free tier, validated and filtered</a:t>
             </a:r>
             <a:endParaRPr lang="en-US" sz="1150" dirty="0"/>
           </a:p>
@@ -4726,7 +4726,7 @@
                 <a:ea typeface="Calibri" pitchFamily="34" charset="-122"/>
                 <a:cs typeface="Calibri" pitchFamily="34" charset="-120"/>
               </a:rPr>
-              <a:t>Reversal &amp; phonetic error rules, grapheme-to-phoneme comparison, synthetic data augmentation</a:t>
+              <a:t>Reversal &amp; phonetic error rules, edit-distance alignment, real-corpus validation (Birkbeck / Holbrook)</a:t>
             </a:r>
             <a:endParaRPr lang="en-US" sz="950" dirty="0"/>
           </a:p>
@@ -4917,7 +4917,7 @@
                 <a:ea typeface="Calibri" pitchFamily="34" charset="-122"/>
                 <a:cs typeface="Calibri" pitchFamily="34" charset="-120"/>
               </a:rPr>
-              <a:t>Whisper ASR pipeline, forced alignment, fluency &amp; mispronunciation features</a:t>
+              <a:t>Whisper ASR pipeline, phoneme-level pronunciation layer, fluency &amp; mismatch features, ASER validation</a:t>
             </a:r>
             <a:endParaRPr lang="en-US" sz="950" dirty="0"/>
           </a:p>
@@ -5299,7 +5299,7 @@
                 <a:ea typeface="Calibri" pitchFamily="34" charset="-122"/>
                 <a:cs typeface="Calibri" pitchFamily="34" charset="-120"/>
               </a:rPr>
-              <a:t>FastAPI endpoints, MySQL schema, object storage, LLM API integration, consent flow</a:t>
+              <a:t>FastAPI endpoints, SQLAlchemy schema (SQLite/MySQL), storage abstraction, optional LLM integration, consent flow</a:t>
             </a:r>
             <a:endParaRPr lang="en-US" sz="950" dirty="0"/>
           </a:p>
@@ -5529,7 +5529,7 @@
                 <a:ea typeface="Calibri" pitchFamily="34" charset="-122"/>
                 <a:cs typeface="Calibri" pitchFamily="34" charset="-120"/>
               </a:rPr>
-              <a:t>Build order: text-only MVP  →  add ASR + fluency  →  ML risk classifier  →  LLM personalized content  →  polish explainability &amp; reporting</a:t>
+              <a:t>Build order: data acquisition &amp; validation  →  NLP + speech + ML  →  API  →  React app  →  demo reliability &amp; documentation</a:t>
             </a:r>
             <a:endParaRPr lang="en-US" sz="1150" dirty="0"/>
           </a:p>
